--- a/10-plantas/01-steelmaking/05-capacitacion/MM-CC-04/MM-CC-04_Capacitacion_AMMX.pptx
+++ b/10-plantas/01-steelmaking/05-capacitacion/MM-CC-04/MM-CC-04_Capacitacion_AMMX.pptx
@@ -4133,7 +4133,7 @@
                 <a:ea typeface="Century Gothic" pitchFamily="34" charset="-122"/>
                 <a:cs typeface="Century Gothic" pitchFamily="34" charset="-120"/>
               </a:rPr>
-              <a:t>Medición a 1 m y en el punto de trabajo: fondo (≈ 0.1–0.3 µSv/h) o &lt; 2 × fondo.</a:t>
+              <a:t>Medición a 1 m y en el punto de trabajo: &lt; 2 × fondo (fondo ≈ 0.1–0.3 µSv/h).</a:t>
             </a:r>
             <a:endParaRPr lang="en-US" sz="1100" dirty="0"/>
           </a:p>
@@ -10194,7 +10194,7 @@
                           <a:ea typeface="Century Gothic" pitchFamily="34" charset="-122"/>
                           <a:cs typeface="Century Gothic" pitchFamily="34" charset="-120"/>
                         </a:rPr>
-                        <a:t>±1 cpm; ±0.1; ≤ 0.15 mm</a:t>
+                        <a:t>±1 cpm; ±0.1 mm; ≤ 0.15 mm</a:t>
                       </a:r>
                       <a:endParaRPr lang="en-US" sz="1000" dirty="0">
                         <a:latin typeface="Century Gothic" charset="0"/>
@@ -13681,7 +13681,7 @@
                 <a:ea typeface="Century Gothic" pitchFamily="34" charset="-122"/>
                 <a:cs typeface="Century Gothic" pitchFamily="34" charset="-120"/>
               </a:rPr>
-              <a:t>Certificación nivel U y protección radiológica</a:t>
+              <a:t>Nivel U y curso POE vigente antes de calibrar</a:t>
             </a:r>
             <a:endParaRPr lang="en-US" sz="2400" dirty="0"/>
           </a:p>
@@ -19212,7 +19212,7 @@
                 <a:ea typeface="Calibri" pitchFamily="34" charset="-122"/>
                 <a:cs typeface="Calibri" pitchFamily="34" charset="-120"/>
               </a:rPr>
-              <a:t>Siguiente paso: OJT supervisado y evaluación práctica (TD-P07); registro en IMaS y DC-3/SIRCE. Validación: pendiente.</a:t>
+              <a:t>Siguiente paso: OJT supervisado y evaluación práctica (TD-P07); registro en IMaS y DC-3/SIRCE. Validación: visto bueno técnica, seguridad, laboral, diseño instruccional.</a:t>
             </a:r>
             <a:endParaRPr lang="en-US" sz="750" dirty="0"/>
           </a:p>
@@ -24966,7 +24966,7 @@
                 <a:ea typeface="Century Gothic" pitchFamily="34" charset="-122"/>
                 <a:cs typeface="Century Gothic" pitchFamily="34" charset="-120"/>
               </a:rPr>
-              <a:t>Doce equipos controlan la interfaz acero–molde</a:t>
+              <a:t>Estos equipos controlan la interfaz acero–molde</a:t>
             </a:r>
             <a:endParaRPr lang="en-US" sz="2400" dirty="0"/>
           </a:p>
